--- a/charte-site.pptx
+++ b/charte-site.pptx
@@ -7,11 +7,14 @@
     <p:sldMasterId id="2147483880" r:id="rId3"/>
   </p:sldMasterIdLst>
   <p:notesMasterIdLst>
-    <p:notesMasterId r:id="rId6"/>
+    <p:notesMasterId r:id="rId9"/>
   </p:notesMasterIdLst>
   <p:sldIdLst>
     <p:sldId id="2972" r:id="rId4"/>
     <p:sldId id="2975" r:id="rId5"/>
+    <p:sldId id="2976" r:id="rId6"/>
+    <p:sldId id="2977" r:id="rId7"/>
+    <p:sldId id="2978" r:id="rId8"/>
   </p:sldIdLst>
   <p:sldSz cx="12192000" cy="6858000"/>
   <p:notesSz cx="6858000" cy="9144000"/>
@@ -221,7 +224,7 @@
           <a:p>
             <a:fld id="{C88B8711-6977-4CA3-ABAD-12E54DF94119}" type="datetimeFigureOut">
               <a:rPr lang="en-GB" smtClean="0"/>
-              <a:t>19/05/2026</a:t>
+              <a:t>20/05/2026</a:t>
             </a:fld>
             <a:endParaRPr lang="en-GB"/>
           </a:p>
@@ -6207,7 +6210,7 @@
         </p:nvSpPr>
         <p:spPr>
           <a:xfrm>
-            <a:off x="5113470" y="5501791"/>
+            <a:off x="6423562" y="3861726"/>
             <a:ext cx="2321169" cy="648000"/>
           </a:xfrm>
           <a:prstGeom prst="bevel">
@@ -6216,7 +6219,7 @@
             </a:avLst>
           </a:prstGeom>
           <a:solidFill>
-            <a:schemeClr val="bg1"/>
+            <a:srgbClr val="FDFAE9"/>
           </a:solidFill>
           <a:ln w="3175">
             <a:solidFill>
@@ -7773,6 +7776,2311 @@
     <p:extLst>
       <p:ext uri="{BB962C8B-B14F-4D97-AF65-F5344CB8AC3E}">
         <p14:creationId xmlns:p14="http://schemas.microsoft.com/office/powerpoint/2010/main" val="3755971657"/>
+      </p:ext>
+    </p:extLst>
+  </p:cSld>
+  <p:clrMapOvr>
+    <a:masterClrMapping/>
+  </p:clrMapOvr>
+</p:sld>
+</file>
+
+<file path=ppt/slides/slide3.xml><?xml version="1.0" encoding="utf-8"?>
+<p:sld xmlns:a="http://schemas.openxmlformats.org/drawingml/2006/main" xmlns:r="http://schemas.openxmlformats.org/officeDocument/2006/relationships" xmlns:p="http://schemas.openxmlformats.org/presentationml/2006/main">
+  <p:cSld>
+    <p:spTree>
+      <p:nvGrpSpPr>
+        <p:cNvPr id="1" name=""/>
+        <p:cNvGrpSpPr/>
+        <p:nvPr/>
+      </p:nvGrpSpPr>
+      <p:grpSpPr>
+        <a:xfrm>
+          <a:off x="0" y="0"/>
+          <a:ext cx="0" cy="0"/>
+          <a:chOff x="0" y="0"/>
+          <a:chExt cx="0" cy="0"/>
+        </a:xfrm>
+      </p:grpSpPr>
+      <p:sp>
+        <p:nvSpPr>
+          <p:cNvPr id="34" name="Rectangle : coins arrondis 33">
+            <a:extLst>
+              <a:ext uri="{FF2B5EF4-FFF2-40B4-BE49-F238E27FC236}">
+                <a16:creationId xmlns:a16="http://schemas.microsoft.com/office/drawing/2014/main" id="{198D8412-D7FE-4CB4-A89D-BDD16911E5D9}"/>
+              </a:ext>
+            </a:extLst>
+          </p:cNvPr>
+          <p:cNvSpPr/>
+          <p:nvPr/>
+        </p:nvSpPr>
+        <p:spPr>
+          <a:xfrm>
+            <a:off x="9571890" y="5845059"/>
+            <a:ext cx="2321169" cy="648000"/>
+          </a:xfrm>
+          <a:prstGeom prst="roundRect">
+            <a:avLst/>
+          </a:prstGeom>
+          <a:solidFill>
+            <a:srgbClr val="D3BFA3"/>
+          </a:solidFill>
+          <a:ln w="19050" cap="flat" cmpd="sng" algn="ctr">
+            <a:solidFill>
+              <a:srgbClr val="D3BFA3"/>
+            </a:solidFill>
+            <a:prstDash val="solid"/>
+          </a:ln>
+          <a:effectLst/>
+        </p:spPr>
+        <p:txBody>
+          <a:bodyPr rtlCol="0" anchor="ctr"/>
+          <a:lstStyle/>
+          <a:p>
+            <a:pPr marL="0" marR="0" lvl="0" indent="0" algn="ctr" defTabSz="914400" eaLnBrk="1" fontAlgn="auto" latinLnBrk="0" hangingPunct="1">
+              <a:lnSpc>
+                <a:spcPct val="100000"/>
+              </a:lnSpc>
+              <a:spcBef>
+                <a:spcPts val="0"/>
+              </a:spcBef>
+              <a:spcAft>
+                <a:spcPts val="0"/>
+              </a:spcAft>
+              <a:buClrTx/>
+              <a:buSzTx/>
+              <a:buFontTx/>
+              <a:buNone/>
+              <a:tabLst/>
+              <a:defRPr/>
+            </a:pPr>
+            <a:r>
+              <a:rPr kumimoji="0" lang="en-US" sz="1800" b="0" i="0" u="none" strike="noStrike" kern="0" cap="none" spc="0" normalizeH="0" baseline="0" noProof="0" dirty="0">
+                <a:ln>
+                  <a:noFill/>
+                </a:ln>
+                <a:solidFill>
+                  <a:srgbClr val="475569"/>
+                </a:solidFill>
+                <a:effectLst/>
+                <a:uLnTx/>
+                <a:uFillTx/>
+                <a:latin typeface="+mj-lt"/>
+                <a:ea typeface="Gadugi" panose="020B0502040204020203" pitchFamily="34" charset="0"/>
+                <a:cs typeface="+mn-cs"/>
+              </a:rPr>
+              <a:t>#D3BFA3</a:t>
+            </a:r>
+          </a:p>
+        </p:txBody>
+      </p:sp>
+      <p:sp>
+        <p:nvSpPr>
+          <p:cNvPr id="35" name="Rectangle : coins arrondis 34">
+            <a:extLst>
+              <a:ext uri="{FF2B5EF4-FFF2-40B4-BE49-F238E27FC236}">
+                <a16:creationId xmlns:a16="http://schemas.microsoft.com/office/drawing/2014/main" id="{D81B4AE1-7C0E-4A7D-A868-5A088FE51896}"/>
+              </a:ext>
+            </a:extLst>
+          </p:cNvPr>
+          <p:cNvSpPr/>
+          <p:nvPr/>
+        </p:nvSpPr>
+        <p:spPr>
+          <a:xfrm>
+            <a:off x="9571891" y="1747552"/>
+            <a:ext cx="2321169" cy="648000"/>
+          </a:xfrm>
+          <a:prstGeom prst="roundRect">
+            <a:avLst/>
+          </a:prstGeom>
+          <a:solidFill>
+            <a:srgbClr val="1C1C1C"/>
+          </a:solidFill>
+          <a:ln w="19050" cap="flat" cmpd="sng" algn="ctr">
+            <a:solidFill>
+              <a:srgbClr val="1C1C1C"/>
+            </a:solidFill>
+            <a:prstDash val="solid"/>
+          </a:ln>
+          <a:effectLst/>
+        </p:spPr>
+        <p:txBody>
+          <a:bodyPr rtlCol="0" anchor="ctr"/>
+          <a:lstStyle/>
+          <a:p>
+            <a:pPr marL="0" marR="0" lvl="0" indent="0" algn="ctr" defTabSz="914400" eaLnBrk="1" fontAlgn="auto" latinLnBrk="0" hangingPunct="1">
+              <a:lnSpc>
+                <a:spcPct val="100000"/>
+              </a:lnSpc>
+              <a:spcBef>
+                <a:spcPts val="0"/>
+              </a:spcBef>
+              <a:spcAft>
+                <a:spcPts val="0"/>
+              </a:spcAft>
+              <a:buClrTx/>
+              <a:buSzTx/>
+              <a:buFontTx/>
+              <a:buNone/>
+              <a:tabLst/>
+              <a:defRPr/>
+            </a:pPr>
+            <a:r>
+              <a:rPr kumimoji="0" lang="en-US" sz="1800" b="0" i="0" u="none" strike="noStrike" kern="0" cap="none" spc="0" normalizeH="0" baseline="0" noProof="0" dirty="0">
+                <a:ln>
+                  <a:noFill/>
+                </a:ln>
+                <a:solidFill>
+                  <a:srgbClr val="FFFFFF"/>
+                </a:solidFill>
+                <a:effectLst/>
+                <a:uLnTx/>
+                <a:uFillTx/>
+                <a:latin typeface="+mj-lt"/>
+                <a:ea typeface="Gadugi" panose="020B0502040204020203" pitchFamily="34" charset="0"/>
+                <a:cs typeface="+mn-cs"/>
+              </a:rPr>
+              <a:t>#1C1C1C</a:t>
+            </a:r>
+          </a:p>
+        </p:txBody>
+      </p:sp>
+      <p:sp>
+        <p:nvSpPr>
+          <p:cNvPr id="36" name="Rectangle : coins arrondis 35">
+            <a:extLst>
+              <a:ext uri="{FF2B5EF4-FFF2-40B4-BE49-F238E27FC236}">
+                <a16:creationId xmlns:a16="http://schemas.microsoft.com/office/drawing/2014/main" id="{D4AB1520-4356-4B09-9FA6-3106277DD3CD}"/>
+              </a:ext>
+            </a:extLst>
+          </p:cNvPr>
+          <p:cNvSpPr/>
+          <p:nvPr/>
+        </p:nvSpPr>
+        <p:spPr>
+          <a:xfrm>
+            <a:off x="9571891" y="2566260"/>
+            <a:ext cx="2321169" cy="648000"/>
+          </a:xfrm>
+          <a:prstGeom prst="roundRect">
+            <a:avLst/>
+          </a:prstGeom>
+          <a:solidFill>
+            <a:srgbClr val="2F5D50"/>
+          </a:solidFill>
+          <a:ln w="19050" cap="flat" cmpd="sng" algn="ctr">
+            <a:solidFill>
+              <a:srgbClr val="2F5D50"/>
+            </a:solidFill>
+            <a:prstDash val="solid"/>
+          </a:ln>
+          <a:effectLst/>
+        </p:spPr>
+        <p:txBody>
+          <a:bodyPr rtlCol="0" anchor="ctr"/>
+          <a:lstStyle/>
+          <a:p>
+            <a:pPr marL="0" marR="0" lvl="0" indent="0" algn="ctr" defTabSz="914400" eaLnBrk="1" fontAlgn="auto" latinLnBrk="0" hangingPunct="1">
+              <a:lnSpc>
+                <a:spcPct val="100000"/>
+              </a:lnSpc>
+              <a:spcBef>
+                <a:spcPts val="0"/>
+              </a:spcBef>
+              <a:spcAft>
+                <a:spcPts val="0"/>
+              </a:spcAft>
+              <a:buClrTx/>
+              <a:buSzTx/>
+              <a:buFontTx/>
+              <a:buNone/>
+              <a:tabLst/>
+              <a:defRPr/>
+            </a:pPr>
+            <a:r>
+              <a:rPr kumimoji="0" lang="en-US" sz="1800" b="0" i="0" u="none" strike="noStrike" kern="0" cap="none" spc="0" normalizeH="0" baseline="0" noProof="0" dirty="0">
+                <a:ln>
+                  <a:noFill/>
+                </a:ln>
+                <a:solidFill>
+                  <a:srgbClr val="FFFFFF"/>
+                </a:solidFill>
+                <a:effectLst/>
+                <a:uLnTx/>
+                <a:uFillTx/>
+                <a:latin typeface="+mj-lt"/>
+                <a:ea typeface="Gadugi" panose="020B0502040204020203" pitchFamily="34" charset="0"/>
+                <a:cs typeface="+mn-cs"/>
+              </a:rPr>
+              <a:t>#2F5D50</a:t>
+            </a:r>
+          </a:p>
+        </p:txBody>
+      </p:sp>
+      <p:sp>
+        <p:nvSpPr>
+          <p:cNvPr id="37" name="Rectangle : coins arrondis 36">
+            <a:extLst>
+              <a:ext uri="{FF2B5EF4-FFF2-40B4-BE49-F238E27FC236}">
+                <a16:creationId xmlns:a16="http://schemas.microsoft.com/office/drawing/2014/main" id="{31B9FE5B-57D6-43D7-98F9-1C277059BB9E}"/>
+              </a:ext>
+            </a:extLst>
+          </p:cNvPr>
+          <p:cNvSpPr/>
+          <p:nvPr/>
+        </p:nvSpPr>
+        <p:spPr>
+          <a:xfrm>
+            <a:off x="9571891" y="3384969"/>
+            <a:ext cx="2321169" cy="648000"/>
+          </a:xfrm>
+          <a:prstGeom prst="roundRect">
+            <a:avLst/>
+          </a:prstGeom>
+          <a:solidFill>
+            <a:srgbClr val="B8D87B"/>
+          </a:solidFill>
+          <a:ln w="19050" cap="flat" cmpd="sng" algn="ctr">
+            <a:solidFill>
+              <a:srgbClr val="B8D87B"/>
+            </a:solidFill>
+            <a:prstDash val="solid"/>
+          </a:ln>
+          <a:effectLst/>
+        </p:spPr>
+        <p:txBody>
+          <a:bodyPr rtlCol="0" anchor="ctr"/>
+          <a:lstStyle/>
+          <a:p>
+            <a:pPr marL="0" marR="0" lvl="0" indent="0" algn="ctr" defTabSz="914400" eaLnBrk="1" fontAlgn="auto" latinLnBrk="0" hangingPunct="1">
+              <a:lnSpc>
+                <a:spcPct val="100000"/>
+              </a:lnSpc>
+              <a:spcBef>
+                <a:spcPts val="0"/>
+              </a:spcBef>
+              <a:spcAft>
+                <a:spcPts val="0"/>
+              </a:spcAft>
+              <a:buClrTx/>
+              <a:buSzTx/>
+              <a:buFontTx/>
+              <a:buNone/>
+              <a:tabLst/>
+              <a:defRPr/>
+            </a:pPr>
+            <a:r>
+              <a:rPr kumimoji="0" lang="en-US" sz="1800" b="0" i="0" u="none" strike="noStrike" kern="0" cap="none" spc="0" normalizeH="0" baseline="0" noProof="0" dirty="0">
+                <a:ln>
+                  <a:noFill/>
+                </a:ln>
+                <a:solidFill>
+                  <a:srgbClr val="FFFFFF"/>
+                </a:solidFill>
+                <a:effectLst/>
+                <a:uLnTx/>
+                <a:uFillTx/>
+                <a:latin typeface="+mj-lt"/>
+                <a:ea typeface="Gadugi" panose="020B0502040204020203" pitchFamily="34" charset="0"/>
+                <a:cs typeface="+mn-cs"/>
+              </a:rPr>
+              <a:t>#B8D87B</a:t>
+            </a:r>
+          </a:p>
+        </p:txBody>
+      </p:sp>
+      <p:sp>
+        <p:nvSpPr>
+          <p:cNvPr id="38" name="Rectangle : coins arrondis 37">
+            <a:extLst>
+              <a:ext uri="{FF2B5EF4-FFF2-40B4-BE49-F238E27FC236}">
+                <a16:creationId xmlns:a16="http://schemas.microsoft.com/office/drawing/2014/main" id="{29236D30-3AC0-4641-9E6B-7B7BD9E262A8}"/>
+              </a:ext>
+            </a:extLst>
+          </p:cNvPr>
+          <p:cNvSpPr/>
+          <p:nvPr/>
+        </p:nvSpPr>
+        <p:spPr>
+          <a:xfrm>
+            <a:off x="9571891" y="4157520"/>
+            <a:ext cx="2321169" cy="648000"/>
+          </a:xfrm>
+          <a:prstGeom prst="roundRect">
+            <a:avLst/>
+          </a:prstGeom>
+          <a:solidFill>
+            <a:srgbClr val="A9D6E5"/>
+          </a:solidFill>
+          <a:ln w="19050" cap="flat" cmpd="sng" algn="ctr">
+            <a:solidFill>
+              <a:srgbClr val="A9D6E5"/>
+            </a:solidFill>
+            <a:prstDash val="solid"/>
+          </a:ln>
+          <a:effectLst/>
+        </p:spPr>
+        <p:txBody>
+          <a:bodyPr rtlCol="0" anchor="ctr"/>
+          <a:lstStyle/>
+          <a:p>
+            <a:pPr marL="0" marR="0" lvl="0" indent="0" algn="ctr" defTabSz="914400" eaLnBrk="1" fontAlgn="auto" latinLnBrk="0" hangingPunct="1">
+              <a:lnSpc>
+                <a:spcPct val="100000"/>
+              </a:lnSpc>
+              <a:spcBef>
+                <a:spcPts val="0"/>
+              </a:spcBef>
+              <a:spcAft>
+                <a:spcPts val="0"/>
+              </a:spcAft>
+              <a:buClrTx/>
+              <a:buSzTx/>
+              <a:buFontTx/>
+              <a:buNone/>
+              <a:tabLst/>
+              <a:defRPr/>
+            </a:pPr>
+            <a:r>
+              <a:rPr kumimoji="0" lang="en-US" sz="1800" b="0" i="0" u="none" strike="noStrike" kern="0" cap="none" spc="0" normalizeH="0" baseline="0" noProof="0" dirty="0">
+                <a:ln>
+                  <a:noFill/>
+                </a:ln>
+                <a:solidFill>
+                  <a:srgbClr val="475569"/>
+                </a:solidFill>
+                <a:effectLst/>
+                <a:uLnTx/>
+                <a:uFillTx/>
+                <a:latin typeface="+mj-lt"/>
+                <a:ea typeface="Gadugi" panose="020B0502040204020203" pitchFamily="34" charset="0"/>
+                <a:cs typeface="+mn-cs"/>
+              </a:rPr>
+              <a:t>#A9D6E5</a:t>
+            </a:r>
+          </a:p>
+        </p:txBody>
+      </p:sp>
+      <p:sp>
+        <p:nvSpPr>
+          <p:cNvPr id="39" name="Rectangle : coins arrondis 38">
+            <a:extLst>
+              <a:ext uri="{FF2B5EF4-FFF2-40B4-BE49-F238E27FC236}">
+                <a16:creationId xmlns:a16="http://schemas.microsoft.com/office/drawing/2014/main" id="{354A27FC-933C-42F0-A342-9E98EEB77747}"/>
+              </a:ext>
+            </a:extLst>
+          </p:cNvPr>
+          <p:cNvSpPr/>
+          <p:nvPr/>
+        </p:nvSpPr>
+        <p:spPr>
+          <a:xfrm>
+            <a:off x="9571891" y="4976229"/>
+            <a:ext cx="2321169" cy="648000"/>
+          </a:xfrm>
+          <a:prstGeom prst="roundRect">
+            <a:avLst/>
+          </a:prstGeom>
+          <a:solidFill>
+            <a:srgbClr val="F96C5B"/>
+          </a:solidFill>
+          <a:ln w="19050" cap="flat" cmpd="sng" algn="ctr">
+            <a:solidFill>
+              <a:srgbClr val="F96C5B"/>
+            </a:solidFill>
+            <a:prstDash val="solid"/>
+          </a:ln>
+          <a:effectLst/>
+        </p:spPr>
+        <p:txBody>
+          <a:bodyPr rtlCol="0" anchor="ctr"/>
+          <a:lstStyle/>
+          <a:p>
+            <a:pPr marL="0" marR="0" lvl="0" indent="0" algn="ctr" defTabSz="914400" eaLnBrk="1" fontAlgn="auto" latinLnBrk="0" hangingPunct="1">
+              <a:lnSpc>
+                <a:spcPct val="100000"/>
+              </a:lnSpc>
+              <a:spcBef>
+                <a:spcPts val="0"/>
+              </a:spcBef>
+              <a:spcAft>
+                <a:spcPts val="0"/>
+              </a:spcAft>
+              <a:buClrTx/>
+              <a:buSzTx/>
+              <a:buFontTx/>
+              <a:buNone/>
+              <a:tabLst/>
+              <a:defRPr/>
+            </a:pPr>
+            <a:r>
+              <a:rPr kumimoji="0" lang="en-US" sz="1800" b="0" i="0" u="none" strike="noStrike" kern="0" cap="none" spc="0" normalizeH="0" baseline="0" noProof="0" dirty="0">
+                <a:ln>
+                  <a:noFill/>
+                </a:ln>
+                <a:solidFill>
+                  <a:srgbClr val="FFFFFF"/>
+                </a:solidFill>
+                <a:effectLst/>
+                <a:uLnTx/>
+                <a:uFillTx/>
+                <a:latin typeface="+mj-lt"/>
+                <a:ea typeface="Gadugi" panose="020B0502040204020203" pitchFamily="34" charset="0"/>
+                <a:cs typeface="+mn-cs"/>
+              </a:rPr>
+              <a:t>#F96C5B</a:t>
+            </a:r>
+          </a:p>
+        </p:txBody>
+      </p:sp>
+      <p:sp>
+        <p:nvSpPr>
+          <p:cNvPr id="40" name="Rectangle : coins arrondis 39">
+            <a:extLst>
+              <a:ext uri="{FF2B5EF4-FFF2-40B4-BE49-F238E27FC236}">
+                <a16:creationId xmlns:a16="http://schemas.microsoft.com/office/drawing/2014/main" id="{5636E521-70A9-447E-AF7A-9AC03A79E678}"/>
+              </a:ext>
+            </a:extLst>
+          </p:cNvPr>
+          <p:cNvSpPr/>
+          <p:nvPr/>
+        </p:nvSpPr>
+        <p:spPr>
+          <a:xfrm>
+            <a:off x="9571889" y="878721"/>
+            <a:ext cx="2321169" cy="648000"/>
+          </a:xfrm>
+          <a:prstGeom prst="roundRect">
+            <a:avLst/>
+          </a:prstGeom>
+          <a:solidFill>
+            <a:srgbClr val="FE7116"/>
+          </a:solidFill>
+          <a:ln w="19050" cap="flat" cmpd="sng" algn="ctr">
+            <a:solidFill>
+              <a:srgbClr val="FE7116"/>
+            </a:solidFill>
+            <a:prstDash val="solid"/>
+          </a:ln>
+          <a:effectLst/>
+        </p:spPr>
+        <p:txBody>
+          <a:bodyPr rtlCol="0" anchor="ctr"/>
+          <a:lstStyle/>
+          <a:p>
+            <a:pPr marL="0" marR="0" lvl="0" indent="0" algn="ctr" defTabSz="914400" eaLnBrk="1" fontAlgn="auto" latinLnBrk="0" hangingPunct="1">
+              <a:lnSpc>
+                <a:spcPct val="100000"/>
+              </a:lnSpc>
+              <a:spcBef>
+                <a:spcPts val="0"/>
+              </a:spcBef>
+              <a:spcAft>
+                <a:spcPts val="0"/>
+              </a:spcAft>
+              <a:buClrTx/>
+              <a:buSzTx/>
+              <a:buFontTx/>
+              <a:buNone/>
+              <a:tabLst/>
+              <a:defRPr/>
+            </a:pPr>
+            <a:r>
+              <a:rPr kumimoji="0" lang="en-US" sz="1800" b="0" i="0" u="none" strike="noStrike" kern="0" cap="none" spc="0" normalizeH="0" baseline="0" noProof="0" dirty="0">
+                <a:ln>
+                  <a:noFill/>
+                </a:ln>
+                <a:solidFill>
+                  <a:srgbClr val="FFFFFF"/>
+                </a:solidFill>
+                <a:effectLst/>
+                <a:uLnTx/>
+                <a:uFillTx/>
+                <a:latin typeface="+mj-lt"/>
+                <a:ea typeface="Gadugi" panose="020B0502040204020203" pitchFamily="34" charset="0"/>
+                <a:cs typeface="+mn-cs"/>
+              </a:rPr>
+              <a:t>#FE7116</a:t>
+            </a:r>
+          </a:p>
+        </p:txBody>
+      </p:sp>
+      <p:sp>
+        <p:nvSpPr>
+          <p:cNvPr id="41" name="ZoneTexte 40">
+            <a:extLst>
+              <a:ext uri="{FF2B5EF4-FFF2-40B4-BE49-F238E27FC236}">
+                <a16:creationId xmlns:a16="http://schemas.microsoft.com/office/drawing/2014/main" id="{61BD5BBB-05DA-4EE3-922E-13699E12FF12}"/>
+              </a:ext>
+            </a:extLst>
+          </p:cNvPr>
+          <p:cNvSpPr txBox="1"/>
+          <p:nvPr/>
+        </p:nvSpPr>
+        <p:spPr>
+          <a:xfrm>
+            <a:off x="9627571" y="244653"/>
+            <a:ext cx="2209803" cy="646331"/>
+          </a:xfrm>
+          <a:prstGeom prst="rect">
+            <a:avLst/>
+          </a:prstGeom>
+          <a:noFill/>
+        </p:spPr>
+        <p:txBody>
+          <a:bodyPr wrap="square" rtlCol="0">
+            <a:spAutoFit/>
+          </a:bodyPr>
+          <a:lstStyle/>
+          <a:p>
+            <a:pPr marL="0" marR="0" lvl="0" indent="0" algn="ctr" defTabSz="914400" eaLnBrk="1" fontAlgn="auto" latinLnBrk="0" hangingPunct="1">
+              <a:lnSpc>
+                <a:spcPct val="100000"/>
+              </a:lnSpc>
+              <a:spcBef>
+                <a:spcPts val="0"/>
+              </a:spcBef>
+              <a:spcAft>
+                <a:spcPts val="0"/>
+              </a:spcAft>
+              <a:buClrTx/>
+              <a:buSzTx/>
+              <a:buFontTx/>
+              <a:buNone/>
+              <a:tabLst/>
+              <a:defRPr/>
+            </a:pPr>
+            <a:r>
+              <a:rPr kumimoji="0" lang="fr-FR" sz="1800" b="0" i="0" u="none" strike="noStrike" kern="0" cap="none" spc="0" normalizeH="0" baseline="0" noProof="0" dirty="0">
+                <a:ln>
+                  <a:noFill/>
+                </a:ln>
+                <a:solidFill>
+                  <a:srgbClr val="1C1C1C"/>
+                </a:solidFill>
+                <a:effectLst/>
+                <a:uLnTx/>
+                <a:uFillTx/>
+                <a:latin typeface="+mj-lt"/>
+              </a:rPr>
+              <a:t>Jeu de couleurs SQW</a:t>
+            </a:r>
+          </a:p>
+        </p:txBody>
+      </p:sp>
+      <p:sp>
+        <p:nvSpPr>
+          <p:cNvPr id="43" name="Rectangle : coins arrondis 42">
+            <a:extLst>
+              <a:ext uri="{FF2B5EF4-FFF2-40B4-BE49-F238E27FC236}">
+                <a16:creationId xmlns:a16="http://schemas.microsoft.com/office/drawing/2014/main" id="{A1812ABD-39F4-49B5-BE61-91BCFE8A9C41}"/>
+              </a:ext>
+            </a:extLst>
+          </p:cNvPr>
+          <p:cNvSpPr/>
+          <p:nvPr/>
+        </p:nvSpPr>
+        <p:spPr>
+          <a:xfrm>
+            <a:off x="6272510" y="3384969"/>
+            <a:ext cx="2321169" cy="648000"/>
+          </a:xfrm>
+          <a:prstGeom prst="roundRect">
+            <a:avLst/>
+          </a:prstGeom>
+          <a:solidFill>
+            <a:srgbClr val="B8D87B"/>
+          </a:solidFill>
+          <a:ln w="19050" cap="flat" cmpd="sng" algn="ctr">
+            <a:solidFill>
+              <a:srgbClr val="B8D87B"/>
+            </a:solidFill>
+            <a:prstDash val="solid"/>
+          </a:ln>
+          <a:effectLst/>
+        </p:spPr>
+        <p:txBody>
+          <a:bodyPr rtlCol="0" anchor="ctr"/>
+          <a:lstStyle/>
+          <a:p>
+            <a:pPr marL="0" marR="0" lvl="0" indent="0" algn="ctr" defTabSz="914400" eaLnBrk="1" fontAlgn="auto" latinLnBrk="0" hangingPunct="1">
+              <a:lnSpc>
+                <a:spcPct val="100000"/>
+              </a:lnSpc>
+              <a:spcBef>
+                <a:spcPts val="0"/>
+              </a:spcBef>
+              <a:spcAft>
+                <a:spcPts val="0"/>
+              </a:spcAft>
+              <a:buClrTx/>
+              <a:buSzTx/>
+              <a:buFontTx/>
+              <a:buNone/>
+              <a:tabLst/>
+              <a:defRPr/>
+            </a:pPr>
+            <a:r>
+              <a:rPr kumimoji="0" lang="en-US" sz="1800" b="0" i="0" u="none" strike="noStrike" kern="0" cap="none" spc="0" normalizeH="0" baseline="0" noProof="0" dirty="0">
+                <a:ln>
+                  <a:noFill/>
+                </a:ln>
+                <a:solidFill>
+                  <a:srgbClr val="475569"/>
+                </a:solidFill>
+                <a:effectLst/>
+                <a:uLnTx/>
+                <a:uFillTx/>
+                <a:latin typeface="+mj-lt"/>
+                <a:ea typeface="Gadugi" panose="020B0502040204020203" pitchFamily="34" charset="0"/>
+                <a:cs typeface="+mn-cs"/>
+              </a:rPr>
+              <a:t>PROFESSIONAL SOLUTIONS</a:t>
+            </a:r>
+          </a:p>
+        </p:txBody>
+      </p:sp>
+      <p:sp>
+        <p:nvSpPr>
+          <p:cNvPr id="44" name="Rectangle : coins arrondis 43">
+            <a:extLst>
+              <a:ext uri="{FF2B5EF4-FFF2-40B4-BE49-F238E27FC236}">
+                <a16:creationId xmlns:a16="http://schemas.microsoft.com/office/drawing/2014/main" id="{F1D64D3C-B58E-4851-8F37-36DF881D0F64}"/>
+              </a:ext>
+            </a:extLst>
+          </p:cNvPr>
+          <p:cNvSpPr/>
+          <p:nvPr/>
+        </p:nvSpPr>
+        <p:spPr>
+          <a:xfrm>
+            <a:off x="6272510" y="890984"/>
+            <a:ext cx="2321169" cy="648000"/>
+          </a:xfrm>
+          <a:prstGeom prst="roundRect">
+            <a:avLst/>
+          </a:prstGeom>
+          <a:solidFill>
+            <a:srgbClr val="FE7116"/>
+          </a:solidFill>
+          <a:ln w="19050" cap="flat" cmpd="sng" algn="ctr">
+            <a:solidFill>
+              <a:srgbClr val="FE7116"/>
+            </a:solidFill>
+            <a:prstDash val="solid"/>
+          </a:ln>
+          <a:effectLst/>
+        </p:spPr>
+        <p:txBody>
+          <a:bodyPr rtlCol="0" anchor="ctr"/>
+          <a:lstStyle/>
+          <a:p>
+            <a:pPr marL="0" marR="0" lvl="0" indent="0" algn="ctr" defTabSz="914400" eaLnBrk="1" fontAlgn="auto" latinLnBrk="0" hangingPunct="1">
+              <a:lnSpc>
+                <a:spcPct val="100000"/>
+              </a:lnSpc>
+              <a:spcBef>
+                <a:spcPts val="0"/>
+              </a:spcBef>
+              <a:spcAft>
+                <a:spcPts val="0"/>
+              </a:spcAft>
+              <a:buClrTx/>
+              <a:buSzTx/>
+              <a:buFontTx/>
+              <a:buNone/>
+              <a:tabLst/>
+              <a:defRPr/>
+            </a:pPr>
+            <a:r>
+              <a:rPr kumimoji="0" lang="en-US" sz="1800" b="0" i="0" u="none" strike="noStrike" kern="0" cap="none" spc="0" normalizeH="0" baseline="0" noProof="0" dirty="0">
+                <a:ln>
+                  <a:noFill/>
+                </a:ln>
+                <a:solidFill>
+                  <a:srgbClr val="FFFFFF"/>
+                </a:solidFill>
+                <a:effectLst/>
+                <a:uLnTx/>
+                <a:uFillTx/>
+                <a:latin typeface="+mj-lt"/>
+                <a:ea typeface="Gadugi" panose="020B0502040204020203" pitchFamily="34" charset="0"/>
+                <a:cs typeface="+mn-cs"/>
+              </a:rPr>
+              <a:t>MY SQWEEZY</a:t>
+            </a:r>
+          </a:p>
+        </p:txBody>
+      </p:sp>
+      <p:sp>
+        <p:nvSpPr>
+          <p:cNvPr id="45" name="Rectangle : coins arrondis 44">
+            <a:extLst>
+              <a:ext uri="{FF2B5EF4-FFF2-40B4-BE49-F238E27FC236}">
+                <a16:creationId xmlns:a16="http://schemas.microsoft.com/office/drawing/2014/main" id="{3BE6665C-8D3C-4583-BCBE-6A005A7C69C8}"/>
+              </a:ext>
+            </a:extLst>
+          </p:cNvPr>
+          <p:cNvSpPr/>
+          <p:nvPr/>
+        </p:nvSpPr>
+        <p:spPr>
+          <a:xfrm>
+            <a:off x="6272510" y="5878954"/>
+            <a:ext cx="2321169" cy="648000"/>
+          </a:xfrm>
+          <a:prstGeom prst="roundRect">
+            <a:avLst/>
+          </a:prstGeom>
+          <a:solidFill>
+            <a:srgbClr val="D3BFA3"/>
+          </a:solidFill>
+          <a:ln w="19050" cap="flat" cmpd="sng" algn="ctr">
+            <a:solidFill>
+              <a:srgbClr val="D3BFA3"/>
+            </a:solidFill>
+            <a:prstDash val="solid"/>
+          </a:ln>
+          <a:effectLst/>
+        </p:spPr>
+        <p:txBody>
+          <a:bodyPr rtlCol="0" anchor="ctr"/>
+          <a:lstStyle/>
+          <a:p>
+            <a:pPr marL="0" marR="0" lvl="0" indent="0" algn="ctr" defTabSz="914400" eaLnBrk="1" fontAlgn="auto" latinLnBrk="0" hangingPunct="1">
+              <a:lnSpc>
+                <a:spcPct val="100000"/>
+              </a:lnSpc>
+              <a:spcBef>
+                <a:spcPts val="0"/>
+              </a:spcBef>
+              <a:spcAft>
+                <a:spcPts val="0"/>
+              </a:spcAft>
+              <a:buClrTx/>
+              <a:buSzTx/>
+              <a:buFontTx/>
+              <a:buNone/>
+              <a:tabLst/>
+              <a:defRPr/>
+            </a:pPr>
+            <a:r>
+              <a:rPr kumimoji="0" lang="en-US" sz="1800" b="0" i="0" u="none" strike="noStrike" kern="0" cap="none" spc="0" normalizeH="0" baseline="0" noProof="0" dirty="0">
+                <a:ln>
+                  <a:noFill/>
+                </a:ln>
+                <a:solidFill>
+                  <a:srgbClr val="475569"/>
+                </a:solidFill>
+                <a:effectLst/>
+                <a:uLnTx/>
+                <a:uFillTx/>
+                <a:latin typeface="+mj-lt"/>
+                <a:ea typeface="Gadugi" panose="020B0502040204020203" pitchFamily="34" charset="0"/>
+                <a:cs typeface="+mn-cs"/>
+              </a:rPr>
+              <a:t>INVESTORS</a:t>
+            </a:r>
+          </a:p>
+          <a:p>
+            <a:pPr marL="0" marR="0" lvl="0" indent="0" algn="ctr" defTabSz="914400" eaLnBrk="1" fontAlgn="auto" latinLnBrk="0" hangingPunct="1">
+              <a:lnSpc>
+                <a:spcPct val="100000"/>
+              </a:lnSpc>
+              <a:spcBef>
+                <a:spcPts val="0"/>
+              </a:spcBef>
+              <a:spcAft>
+                <a:spcPts val="0"/>
+              </a:spcAft>
+              <a:buClrTx/>
+              <a:buSzTx/>
+              <a:buFontTx/>
+              <a:buNone/>
+              <a:tabLst/>
+              <a:defRPr/>
+            </a:pPr>
+            <a:r>
+              <a:rPr kumimoji="0" lang="en-US" sz="1800" b="0" i="0" u="none" strike="noStrike" kern="0" cap="none" spc="0" normalizeH="0" baseline="0" noProof="0" dirty="0">
+                <a:ln>
+                  <a:noFill/>
+                </a:ln>
+                <a:solidFill>
+                  <a:srgbClr val="475569"/>
+                </a:solidFill>
+                <a:effectLst/>
+                <a:uLnTx/>
+                <a:uFillTx/>
+                <a:latin typeface="+mj-lt"/>
+                <a:ea typeface="Gadugi" panose="020B0502040204020203" pitchFamily="34" charset="0"/>
+                <a:cs typeface="+mn-cs"/>
+              </a:rPr>
+              <a:t>OPPORTUNITY</a:t>
+            </a:r>
+          </a:p>
+        </p:txBody>
+      </p:sp>
+      <p:sp>
+        <p:nvSpPr>
+          <p:cNvPr id="46" name="Rectangle : coins arrondis 45">
+            <a:extLst>
+              <a:ext uri="{FF2B5EF4-FFF2-40B4-BE49-F238E27FC236}">
+                <a16:creationId xmlns:a16="http://schemas.microsoft.com/office/drawing/2014/main" id="{80E2AA6F-21E1-4C59-9BF2-C4A1206802B3}"/>
+              </a:ext>
+            </a:extLst>
+          </p:cNvPr>
+          <p:cNvSpPr/>
+          <p:nvPr/>
+        </p:nvSpPr>
+        <p:spPr>
+          <a:xfrm>
+            <a:off x="6272509" y="4157520"/>
+            <a:ext cx="2321169" cy="648000"/>
+          </a:xfrm>
+          <a:prstGeom prst="roundRect">
+            <a:avLst/>
+          </a:prstGeom>
+          <a:solidFill>
+            <a:srgbClr val="A9D6E5"/>
+          </a:solidFill>
+          <a:ln w="19050" cap="flat" cmpd="sng" algn="ctr">
+            <a:solidFill>
+              <a:srgbClr val="A9D6E5"/>
+            </a:solidFill>
+            <a:prstDash val="solid"/>
+          </a:ln>
+          <a:effectLst/>
+        </p:spPr>
+        <p:txBody>
+          <a:bodyPr rtlCol="0" anchor="ctr"/>
+          <a:lstStyle/>
+          <a:p>
+            <a:pPr marL="0" marR="0" lvl="0" indent="0" algn="ctr" defTabSz="914400" eaLnBrk="1" fontAlgn="auto" latinLnBrk="0" hangingPunct="1">
+              <a:lnSpc>
+                <a:spcPct val="100000"/>
+              </a:lnSpc>
+              <a:spcBef>
+                <a:spcPts val="0"/>
+              </a:spcBef>
+              <a:spcAft>
+                <a:spcPts val="0"/>
+              </a:spcAft>
+              <a:buClrTx/>
+              <a:buSzTx/>
+              <a:buFontTx/>
+              <a:buNone/>
+              <a:tabLst/>
+              <a:defRPr/>
+            </a:pPr>
+            <a:r>
+              <a:rPr kumimoji="0" lang="en-US" sz="1800" b="0" i="0" u="none" strike="noStrike" kern="0" cap="none" spc="0" normalizeH="0" baseline="0" noProof="0" dirty="0">
+                <a:ln>
+                  <a:noFill/>
+                </a:ln>
+                <a:solidFill>
+                  <a:srgbClr val="475569"/>
+                </a:solidFill>
+                <a:effectLst/>
+                <a:uLnTx/>
+                <a:uFillTx/>
+                <a:latin typeface="+mj-lt"/>
+                <a:ea typeface="Gadugi" panose="020B0502040204020203" pitchFamily="34" charset="0"/>
+                <a:cs typeface="+mn-cs"/>
+              </a:rPr>
+              <a:t>PRE-ORDER</a:t>
+            </a:r>
+          </a:p>
+        </p:txBody>
+      </p:sp>
+    </p:spTree>
+    <p:extLst>
+      <p:ext uri="{BB962C8B-B14F-4D97-AF65-F5344CB8AC3E}">
+        <p14:creationId xmlns:p14="http://schemas.microsoft.com/office/powerpoint/2010/main" val="626063337"/>
+      </p:ext>
+    </p:extLst>
+  </p:cSld>
+  <p:clrMapOvr>
+    <a:masterClrMapping/>
+  </p:clrMapOvr>
+</p:sld>
+</file>
+
+<file path=ppt/slides/slide4.xml><?xml version="1.0" encoding="utf-8"?>
+<p:sld xmlns:a="http://schemas.openxmlformats.org/drawingml/2006/main" xmlns:r="http://schemas.openxmlformats.org/officeDocument/2006/relationships" xmlns:p="http://schemas.openxmlformats.org/presentationml/2006/main">
+  <p:cSld>
+    <p:spTree>
+      <p:nvGrpSpPr>
+        <p:cNvPr id="1" name=""/>
+        <p:cNvGrpSpPr/>
+        <p:nvPr/>
+      </p:nvGrpSpPr>
+      <p:grpSpPr>
+        <a:xfrm>
+          <a:off x="0" y="0"/>
+          <a:ext cx="0" cy="0"/>
+          <a:chOff x="0" y="0"/>
+          <a:chExt cx="0" cy="0"/>
+        </a:xfrm>
+      </p:grpSpPr>
+      <p:pic>
+        <p:nvPicPr>
+          <p:cNvPr id="3" name="Image 2">
+            <a:extLst>
+              <a:ext uri="{FF2B5EF4-FFF2-40B4-BE49-F238E27FC236}">
+                <a16:creationId xmlns:a16="http://schemas.microsoft.com/office/drawing/2014/main" id="{25885694-E215-4FC9-8EC6-C0AE5F28F855}"/>
+              </a:ext>
+            </a:extLst>
+          </p:cNvPr>
+          <p:cNvPicPr>
+            <a:picLocks noChangeAspect="1"/>
+          </p:cNvPicPr>
+          <p:nvPr/>
+        </p:nvPicPr>
+        <p:blipFill>
+          <a:blip r:embed="rId2">
+            <a:duotone>
+              <a:schemeClr val="accent3">
+                <a:shade val="45000"/>
+                <a:satMod val="135000"/>
+              </a:schemeClr>
+              <a:prstClr val="white"/>
+            </a:duotone>
+            <a:extLst>
+              <a:ext uri="{28A0092B-C50C-407E-A947-70E740481C1C}">
+                <a14:useLocalDpi xmlns:a14="http://schemas.microsoft.com/office/drawing/2010/main" val="0"/>
+              </a:ext>
+            </a:extLst>
+          </a:blip>
+          <a:stretch>
+            <a:fillRect/>
+          </a:stretch>
+        </p:blipFill>
+        <p:spPr>
+          <a:xfrm>
+            <a:off x="5995522" y="627701"/>
+            <a:ext cx="1681006" cy="1440862"/>
+          </a:xfrm>
+          <a:prstGeom prst="rect">
+            <a:avLst/>
+          </a:prstGeom>
+        </p:spPr>
+      </p:pic>
+      <p:pic>
+        <p:nvPicPr>
+          <p:cNvPr id="5" name="Image 4">
+            <a:extLst>
+              <a:ext uri="{FF2B5EF4-FFF2-40B4-BE49-F238E27FC236}">
+                <a16:creationId xmlns:a16="http://schemas.microsoft.com/office/drawing/2014/main" id="{62E041E7-B52C-45D7-8B34-47FA4E3055E3}"/>
+              </a:ext>
+            </a:extLst>
+          </p:cNvPr>
+          <p:cNvPicPr>
+            <a:picLocks noChangeAspect="1"/>
+          </p:cNvPicPr>
+          <p:nvPr/>
+        </p:nvPicPr>
+        <p:blipFill>
+          <a:blip r:embed="rId3">
+            <a:duotone>
+              <a:schemeClr val="accent3">
+                <a:shade val="45000"/>
+                <a:satMod val="135000"/>
+              </a:schemeClr>
+              <a:prstClr val="white"/>
+            </a:duotone>
+            <a:extLst>
+              <a:ext uri="{28A0092B-C50C-407E-A947-70E740481C1C}">
+                <a14:useLocalDpi xmlns:a14="http://schemas.microsoft.com/office/drawing/2010/main" val="0"/>
+              </a:ext>
+            </a:extLst>
+          </a:blip>
+          <a:stretch>
+            <a:fillRect/>
+          </a:stretch>
+        </p:blipFill>
+        <p:spPr>
+          <a:xfrm>
+            <a:off x="2308469" y="627701"/>
+            <a:ext cx="1789934" cy="1391034"/>
+          </a:xfrm>
+          <a:prstGeom prst="rect">
+            <a:avLst/>
+          </a:prstGeom>
+        </p:spPr>
+      </p:pic>
+      <p:pic>
+        <p:nvPicPr>
+          <p:cNvPr id="7" name="Image 6">
+            <a:extLst>
+              <a:ext uri="{FF2B5EF4-FFF2-40B4-BE49-F238E27FC236}">
+                <a16:creationId xmlns:a16="http://schemas.microsoft.com/office/drawing/2014/main" id="{F2E20A55-E170-4988-8139-5E452D0B9C16}"/>
+              </a:ext>
+            </a:extLst>
+          </p:cNvPr>
+          <p:cNvPicPr>
+            <a:picLocks noChangeAspect="1"/>
+          </p:cNvPicPr>
+          <p:nvPr/>
+        </p:nvPicPr>
+        <p:blipFill>
+          <a:blip r:embed="rId4">
+            <a:duotone>
+              <a:schemeClr val="accent3">
+                <a:shade val="45000"/>
+                <a:satMod val="135000"/>
+              </a:schemeClr>
+              <a:prstClr val="white"/>
+            </a:duotone>
+            <a:extLst>
+              <a:ext uri="{28A0092B-C50C-407E-A947-70E740481C1C}">
+                <a14:useLocalDpi xmlns:a14="http://schemas.microsoft.com/office/drawing/2010/main" val="0"/>
+              </a:ext>
+            </a:extLst>
+          </a:blip>
+          <a:stretch>
+            <a:fillRect/>
+          </a:stretch>
+        </p:blipFill>
+        <p:spPr>
+          <a:xfrm>
+            <a:off x="9754126" y="648604"/>
+            <a:ext cx="1240414" cy="1510504"/>
+          </a:xfrm>
+          <a:prstGeom prst="rect">
+            <a:avLst/>
+          </a:prstGeom>
+        </p:spPr>
+      </p:pic>
+      <p:pic>
+        <p:nvPicPr>
+          <p:cNvPr id="9" name="Image 8">
+            <a:extLst>
+              <a:ext uri="{FF2B5EF4-FFF2-40B4-BE49-F238E27FC236}">
+                <a16:creationId xmlns:a16="http://schemas.microsoft.com/office/drawing/2014/main" id="{E71CCEA6-3A54-42C0-841B-EA753C2D9D04}"/>
+              </a:ext>
+            </a:extLst>
+          </p:cNvPr>
+          <p:cNvPicPr>
+            <a:picLocks noChangeAspect="1"/>
+          </p:cNvPicPr>
+          <p:nvPr/>
+        </p:nvPicPr>
+        <p:blipFill>
+          <a:blip r:embed="rId5">
+            <a:duotone>
+              <a:schemeClr val="accent3">
+                <a:shade val="45000"/>
+                <a:satMod val="135000"/>
+              </a:schemeClr>
+              <a:prstClr val="white"/>
+            </a:duotone>
+            <a:extLst>
+              <a:ext uri="{28A0092B-C50C-407E-A947-70E740481C1C}">
+                <a14:useLocalDpi xmlns:a14="http://schemas.microsoft.com/office/drawing/2010/main" val="0"/>
+              </a:ext>
+            </a:extLst>
+          </a:blip>
+          <a:stretch>
+            <a:fillRect/>
+          </a:stretch>
+        </p:blipFill>
+        <p:spPr>
+          <a:xfrm>
+            <a:off x="4390709" y="627701"/>
+            <a:ext cx="1312507" cy="1312507"/>
+          </a:xfrm>
+          <a:prstGeom prst="rect">
+            <a:avLst/>
+          </a:prstGeom>
+        </p:spPr>
+      </p:pic>
+      <p:pic>
+        <p:nvPicPr>
+          <p:cNvPr id="14" name="Image 13">
+            <a:extLst>
+              <a:ext uri="{FF2B5EF4-FFF2-40B4-BE49-F238E27FC236}">
+                <a16:creationId xmlns:a16="http://schemas.microsoft.com/office/drawing/2014/main" id="{8D2F0A86-4597-4951-81B1-3604A29E589A}"/>
+              </a:ext>
+            </a:extLst>
+          </p:cNvPr>
+          <p:cNvPicPr>
+            <a:picLocks noChangeAspect="1"/>
+          </p:cNvPicPr>
+          <p:nvPr/>
+        </p:nvPicPr>
+        <p:blipFill>
+          <a:blip r:embed="rId6">
+            <a:duotone>
+              <a:schemeClr val="accent3">
+                <a:shade val="45000"/>
+                <a:satMod val="135000"/>
+              </a:schemeClr>
+              <a:prstClr val="white"/>
+            </a:duotone>
+            <a:extLst>
+              <a:ext uri="{28A0092B-C50C-407E-A947-70E740481C1C}">
+                <a14:useLocalDpi xmlns:a14="http://schemas.microsoft.com/office/drawing/2010/main" val="0"/>
+              </a:ext>
+            </a:extLst>
+          </a:blip>
+          <a:stretch>
+            <a:fillRect/>
+          </a:stretch>
+        </p:blipFill>
+        <p:spPr>
+          <a:xfrm>
+            <a:off x="2462355" y="2333723"/>
+            <a:ext cx="1789935" cy="1789935"/>
+          </a:xfrm>
+          <a:prstGeom prst="rect">
+            <a:avLst/>
+          </a:prstGeom>
+        </p:spPr>
+      </p:pic>
+      <p:pic>
+        <p:nvPicPr>
+          <p:cNvPr id="16" name="Image 15">
+            <a:extLst>
+              <a:ext uri="{FF2B5EF4-FFF2-40B4-BE49-F238E27FC236}">
+                <a16:creationId xmlns:a16="http://schemas.microsoft.com/office/drawing/2014/main" id="{DABDBB2D-9EC5-4DA0-9E3C-E2F1497DCD3D}"/>
+              </a:ext>
+            </a:extLst>
+          </p:cNvPr>
+          <p:cNvPicPr>
+            <a:picLocks noChangeAspect="1"/>
+          </p:cNvPicPr>
+          <p:nvPr/>
+        </p:nvPicPr>
+        <p:blipFill>
+          <a:blip r:embed="rId7">
+            <a:duotone>
+              <a:schemeClr val="accent3">
+                <a:shade val="45000"/>
+                <a:satMod val="135000"/>
+              </a:schemeClr>
+              <a:prstClr val="white"/>
+            </a:duotone>
+            <a:extLst>
+              <a:ext uri="{28A0092B-C50C-407E-A947-70E740481C1C}">
+                <a14:useLocalDpi xmlns:a14="http://schemas.microsoft.com/office/drawing/2010/main" val="0"/>
+              </a:ext>
+            </a:extLst>
+          </a:blip>
+          <a:stretch>
+            <a:fillRect/>
+          </a:stretch>
+        </p:blipFill>
+        <p:spPr>
+          <a:xfrm>
+            <a:off x="4510113" y="2333723"/>
+            <a:ext cx="1789935" cy="1789935"/>
+          </a:xfrm>
+          <a:prstGeom prst="rect">
+            <a:avLst/>
+          </a:prstGeom>
+        </p:spPr>
+      </p:pic>
+      <p:grpSp>
+        <p:nvGrpSpPr>
+          <p:cNvPr id="22" name="Groupe 21">
+            <a:extLst>
+              <a:ext uri="{FF2B5EF4-FFF2-40B4-BE49-F238E27FC236}">
+                <a16:creationId xmlns:a16="http://schemas.microsoft.com/office/drawing/2014/main" id="{002B957C-4B4E-424F-BFDB-5D0F46AA2465}"/>
+              </a:ext>
+            </a:extLst>
+          </p:cNvPr>
+          <p:cNvGrpSpPr/>
+          <p:nvPr/>
+        </p:nvGrpSpPr>
+        <p:grpSpPr>
+          <a:xfrm>
+            <a:off x="7306434" y="3771482"/>
+            <a:ext cx="1501300" cy="1158684"/>
+            <a:chOff x="7306434" y="3771482"/>
+            <a:chExt cx="1501300" cy="1158684"/>
+          </a:xfrm>
+        </p:grpSpPr>
+        <p:pic>
+          <p:nvPicPr>
+            <p:cNvPr id="11" name="Image 10">
+              <a:extLst>
+                <a:ext uri="{FF2B5EF4-FFF2-40B4-BE49-F238E27FC236}">
+                  <a16:creationId xmlns:a16="http://schemas.microsoft.com/office/drawing/2014/main" id="{B25067CF-F0DA-444F-8C35-50C4A09DE447}"/>
+                </a:ext>
+              </a:extLst>
+            </p:cNvPr>
+            <p:cNvPicPr>
+              <a:picLocks noChangeAspect="1"/>
+            </p:cNvPicPr>
+            <p:nvPr/>
+          </p:nvPicPr>
+          <p:blipFill>
+            <a:blip r:embed="rId8">
+              <a:lum bright="70000" contrast="-70000"/>
+              <a:extLst>
+                <a:ext uri="{28A0092B-C50C-407E-A947-70E740481C1C}">
+                  <a14:useLocalDpi xmlns:a14="http://schemas.microsoft.com/office/drawing/2010/main" val="0"/>
+                </a:ext>
+              </a:extLst>
+            </a:blip>
+            <a:stretch>
+              <a:fillRect/>
+            </a:stretch>
+          </p:blipFill>
+          <p:spPr>
+            <a:xfrm>
+              <a:off x="7306434" y="3771483"/>
+              <a:ext cx="685065" cy="685065"/>
+            </a:xfrm>
+            <a:prstGeom prst="rect">
+              <a:avLst/>
+            </a:prstGeom>
+          </p:spPr>
+        </p:pic>
+        <p:pic>
+          <p:nvPicPr>
+            <p:cNvPr id="18" name="Image 17">
+              <a:extLst>
+                <a:ext uri="{FF2B5EF4-FFF2-40B4-BE49-F238E27FC236}">
+                  <a16:creationId xmlns:a16="http://schemas.microsoft.com/office/drawing/2014/main" id="{C0986002-1207-4291-A3FD-B44FF2D242AB}"/>
+                </a:ext>
+              </a:extLst>
+            </p:cNvPr>
+            <p:cNvPicPr>
+              <a:picLocks noChangeAspect="1"/>
+            </p:cNvPicPr>
+            <p:nvPr/>
+          </p:nvPicPr>
+          <p:blipFill>
+            <a:blip r:embed="rId8">
+              <a:lum bright="70000" contrast="-70000"/>
+              <a:extLst>
+                <a:ext uri="{28A0092B-C50C-407E-A947-70E740481C1C}">
+                  <a14:useLocalDpi xmlns:a14="http://schemas.microsoft.com/office/drawing/2010/main" val="0"/>
+                </a:ext>
+              </a:extLst>
+            </a:blip>
+            <a:stretch>
+              <a:fillRect/>
+            </a:stretch>
+          </p:blipFill>
+          <p:spPr>
+            <a:xfrm>
+              <a:off x="8122669" y="3771482"/>
+              <a:ext cx="685065" cy="685065"/>
+            </a:xfrm>
+            <a:prstGeom prst="rect">
+              <a:avLst/>
+            </a:prstGeom>
+          </p:spPr>
+        </p:pic>
+        <p:sp>
+          <p:nvSpPr>
+            <p:cNvPr id="19" name="Signe de multiplication 18">
+              <a:extLst>
+                <a:ext uri="{FF2B5EF4-FFF2-40B4-BE49-F238E27FC236}">
+                  <a16:creationId xmlns:a16="http://schemas.microsoft.com/office/drawing/2014/main" id="{2A3A789D-4AE7-4B6F-A10F-1092E1D38EDC}"/>
+                </a:ext>
+              </a:extLst>
+            </p:cNvPr>
+            <p:cNvSpPr>
+              <a:spLocks noChangeAspect="1"/>
+            </p:cNvSpPr>
+            <p:nvPr/>
+          </p:nvSpPr>
+          <p:spPr>
+            <a:xfrm>
+              <a:off x="7473124" y="4079081"/>
+              <a:ext cx="360000" cy="360000"/>
+            </a:xfrm>
+            <a:prstGeom prst="mathMultiply">
+              <a:avLst/>
+            </a:prstGeom>
+            <a:solidFill>
+              <a:srgbClr val="FE7116"/>
+            </a:solidFill>
+            <a:ln>
+              <a:solidFill>
+                <a:srgbClr val="FE7116"/>
+              </a:solidFill>
+            </a:ln>
+          </p:spPr>
+          <p:style>
+            <a:lnRef idx="2">
+              <a:schemeClr val="accent1">
+                <a:shade val="50000"/>
+              </a:schemeClr>
+            </a:lnRef>
+            <a:fillRef idx="1">
+              <a:schemeClr val="accent1"/>
+            </a:fillRef>
+            <a:effectRef idx="0">
+              <a:schemeClr val="accent1"/>
+            </a:effectRef>
+            <a:fontRef idx="minor">
+              <a:schemeClr val="lt1"/>
+            </a:fontRef>
+          </p:style>
+          <p:txBody>
+            <a:bodyPr rtlCol="0" anchor="ctr"/>
+            <a:lstStyle/>
+            <a:p>
+              <a:pPr algn="ctr"/>
+              <a:endParaRPr lang="fr-FR"/>
+            </a:p>
+          </p:txBody>
+        </p:sp>
+        <p:sp>
+          <p:nvSpPr>
+            <p:cNvPr id="20" name="Signe de multiplication 19">
+              <a:extLst>
+                <a:ext uri="{FF2B5EF4-FFF2-40B4-BE49-F238E27FC236}">
+                  <a16:creationId xmlns:a16="http://schemas.microsoft.com/office/drawing/2014/main" id="{9A756736-BA39-4B62-BAE4-A6715E4DFC04}"/>
+                </a:ext>
+              </a:extLst>
+            </p:cNvPr>
+            <p:cNvSpPr>
+              <a:spLocks noChangeAspect="1"/>
+            </p:cNvSpPr>
+            <p:nvPr/>
+          </p:nvSpPr>
+          <p:spPr>
+            <a:xfrm>
+              <a:off x="8285201" y="4079081"/>
+              <a:ext cx="360000" cy="360000"/>
+            </a:xfrm>
+            <a:prstGeom prst="mathMultiply">
+              <a:avLst/>
+            </a:prstGeom>
+            <a:solidFill>
+              <a:srgbClr val="FE7116"/>
+            </a:solidFill>
+            <a:ln>
+              <a:solidFill>
+                <a:srgbClr val="FE7116"/>
+              </a:solidFill>
+            </a:ln>
+          </p:spPr>
+          <p:style>
+            <a:lnRef idx="2">
+              <a:schemeClr val="accent1">
+                <a:shade val="50000"/>
+              </a:schemeClr>
+            </a:lnRef>
+            <a:fillRef idx="1">
+              <a:schemeClr val="accent1"/>
+            </a:fillRef>
+            <a:effectRef idx="0">
+              <a:schemeClr val="accent1"/>
+            </a:effectRef>
+            <a:fontRef idx="minor">
+              <a:schemeClr val="lt1"/>
+            </a:fontRef>
+          </p:style>
+          <p:txBody>
+            <a:bodyPr rtlCol="0" anchor="ctr"/>
+            <a:lstStyle/>
+            <a:p>
+              <a:pPr algn="ctr"/>
+              <a:endParaRPr lang="fr-FR"/>
+            </a:p>
+          </p:txBody>
+        </p:sp>
+        <p:pic>
+          <p:nvPicPr>
+            <p:cNvPr id="17" name="Image 16">
+              <a:extLst>
+                <a:ext uri="{FF2B5EF4-FFF2-40B4-BE49-F238E27FC236}">
+                  <a16:creationId xmlns:a16="http://schemas.microsoft.com/office/drawing/2014/main" id="{85B0434D-2062-4269-AB90-7EF0CCF93E31}"/>
+                </a:ext>
+              </a:extLst>
+            </p:cNvPr>
+            <p:cNvPicPr>
+              <a:picLocks noChangeAspect="1"/>
+            </p:cNvPicPr>
+            <p:nvPr/>
+          </p:nvPicPr>
+          <p:blipFill>
+            <a:blip r:embed="rId8">
+              <a:duotone>
+                <a:schemeClr val="accent3">
+                  <a:shade val="45000"/>
+                  <a:satMod val="135000"/>
+                </a:schemeClr>
+                <a:prstClr val="white"/>
+              </a:duotone>
+              <a:extLst>
+                <a:ext uri="{28A0092B-C50C-407E-A947-70E740481C1C}">
+                  <a14:useLocalDpi xmlns:a14="http://schemas.microsoft.com/office/drawing/2010/main" val="0"/>
+                </a:ext>
+              </a:extLst>
+            </a:blip>
+            <a:stretch>
+              <a:fillRect/>
+            </a:stretch>
+          </p:blipFill>
+          <p:spPr>
+            <a:xfrm>
+              <a:off x="7713127" y="4245100"/>
+              <a:ext cx="685066" cy="685066"/>
+            </a:xfrm>
+            <a:prstGeom prst="rect">
+              <a:avLst/>
+            </a:prstGeom>
+            <a:noFill/>
+          </p:spPr>
+        </p:pic>
+      </p:grpSp>
+      <p:pic>
+        <p:nvPicPr>
+          <p:cNvPr id="24" name="Image 23">
+            <a:extLst>
+              <a:ext uri="{FF2B5EF4-FFF2-40B4-BE49-F238E27FC236}">
+                <a16:creationId xmlns:a16="http://schemas.microsoft.com/office/drawing/2014/main" id="{1B4C5CFB-5E73-418E-BBD5-17024C6644D3}"/>
+              </a:ext>
+            </a:extLst>
+          </p:cNvPr>
+          <p:cNvPicPr>
+            <a:picLocks noChangeAspect="1"/>
+          </p:cNvPicPr>
+          <p:nvPr/>
+        </p:nvPicPr>
+        <p:blipFill>
+          <a:blip r:embed="rId9">
+            <a:duotone>
+              <a:schemeClr val="accent3">
+                <a:shade val="45000"/>
+                <a:satMod val="135000"/>
+              </a:schemeClr>
+              <a:prstClr val="white"/>
+            </a:duotone>
+            <a:extLst>
+              <a:ext uri="{28A0092B-C50C-407E-A947-70E740481C1C}">
+                <a14:useLocalDpi xmlns:a14="http://schemas.microsoft.com/office/drawing/2010/main" val="0"/>
+              </a:ext>
+            </a:extLst>
+          </a:blip>
+          <a:stretch>
+            <a:fillRect/>
+          </a:stretch>
+        </p:blipFill>
+        <p:spPr>
+          <a:xfrm>
+            <a:off x="2743505" y="4553146"/>
+            <a:ext cx="1035527" cy="1035527"/>
+          </a:xfrm>
+          <a:prstGeom prst="rect">
+            <a:avLst/>
+          </a:prstGeom>
+        </p:spPr>
+      </p:pic>
+      <p:pic>
+        <p:nvPicPr>
+          <p:cNvPr id="26" name="Image 25">
+            <a:extLst>
+              <a:ext uri="{FF2B5EF4-FFF2-40B4-BE49-F238E27FC236}">
+                <a16:creationId xmlns:a16="http://schemas.microsoft.com/office/drawing/2014/main" id="{A58E5226-8B86-4AC0-A7FD-68F64F76601E}"/>
+              </a:ext>
+            </a:extLst>
+          </p:cNvPr>
+          <p:cNvPicPr>
+            <a:picLocks noChangeAspect="1"/>
+          </p:cNvPicPr>
+          <p:nvPr/>
+        </p:nvPicPr>
+        <p:blipFill>
+          <a:blip r:embed="rId10">
+            <a:duotone>
+              <a:schemeClr val="accent3">
+                <a:shade val="45000"/>
+                <a:satMod val="135000"/>
+              </a:schemeClr>
+              <a:prstClr val="white"/>
+            </a:duotone>
+            <a:extLst>
+              <a:ext uri="{28A0092B-C50C-407E-A947-70E740481C1C}">
+                <a14:useLocalDpi xmlns:a14="http://schemas.microsoft.com/office/drawing/2010/main" val="0"/>
+              </a:ext>
+            </a:extLst>
+          </a:blip>
+          <a:stretch>
+            <a:fillRect/>
+          </a:stretch>
+        </p:blipFill>
+        <p:spPr>
+          <a:xfrm>
+            <a:off x="5027955" y="4375392"/>
+            <a:ext cx="1320444" cy="1391034"/>
+          </a:xfrm>
+          <a:prstGeom prst="rect">
+            <a:avLst/>
+          </a:prstGeom>
+        </p:spPr>
+      </p:pic>
+      <p:pic>
+        <p:nvPicPr>
+          <p:cNvPr id="28" name="Image 27">
+            <a:extLst>
+              <a:ext uri="{FF2B5EF4-FFF2-40B4-BE49-F238E27FC236}">
+                <a16:creationId xmlns:a16="http://schemas.microsoft.com/office/drawing/2014/main" id="{F414C1D4-59F1-41FA-A333-344C5C9620AB}"/>
+              </a:ext>
+            </a:extLst>
+          </p:cNvPr>
+          <p:cNvPicPr>
+            <a:picLocks noChangeAspect="1"/>
+          </p:cNvPicPr>
+          <p:nvPr/>
+        </p:nvPicPr>
+        <p:blipFill>
+          <a:blip r:embed="rId11">
+            <a:duotone>
+              <a:schemeClr val="accent3">
+                <a:shade val="45000"/>
+                <a:satMod val="135000"/>
+              </a:schemeClr>
+              <a:prstClr val="white"/>
+            </a:duotone>
+            <a:extLst>
+              <a:ext uri="{28A0092B-C50C-407E-A947-70E740481C1C}">
+                <a14:useLocalDpi xmlns:a14="http://schemas.microsoft.com/office/drawing/2010/main" val="0"/>
+              </a:ext>
+            </a:extLst>
+          </a:blip>
+          <a:stretch>
+            <a:fillRect/>
+          </a:stretch>
+        </p:blipFill>
+        <p:spPr>
+          <a:xfrm>
+            <a:off x="9736741" y="3938783"/>
+            <a:ext cx="1198132" cy="1035528"/>
+          </a:xfrm>
+          <a:prstGeom prst="rect">
+            <a:avLst/>
+          </a:prstGeom>
+        </p:spPr>
+      </p:pic>
+      <p:pic>
+        <p:nvPicPr>
+          <p:cNvPr id="30" name="Image 29">
+            <a:extLst>
+              <a:ext uri="{FF2B5EF4-FFF2-40B4-BE49-F238E27FC236}">
+                <a16:creationId xmlns:a16="http://schemas.microsoft.com/office/drawing/2014/main" id="{02EC40E1-72D3-4DCD-ACD3-62C04E557BA8}"/>
+              </a:ext>
+            </a:extLst>
+          </p:cNvPr>
+          <p:cNvPicPr>
+            <a:picLocks noChangeAspect="1"/>
+          </p:cNvPicPr>
+          <p:nvPr/>
+        </p:nvPicPr>
+        <p:blipFill>
+          <a:blip r:embed="rId12">
+            <a:duotone>
+              <a:schemeClr val="accent3">
+                <a:shade val="45000"/>
+                <a:satMod val="135000"/>
+              </a:schemeClr>
+              <a:prstClr val="white"/>
+            </a:duotone>
+            <a:extLst>
+              <a:ext uri="{28A0092B-C50C-407E-A947-70E740481C1C}">
+                <a14:useLocalDpi xmlns:a14="http://schemas.microsoft.com/office/drawing/2010/main" val="0"/>
+              </a:ext>
+            </a:extLst>
+          </a:blip>
+          <a:stretch>
+            <a:fillRect/>
+          </a:stretch>
+        </p:blipFill>
+        <p:spPr>
+          <a:xfrm>
+            <a:off x="9897184" y="2210730"/>
+            <a:ext cx="1633346" cy="1416974"/>
+          </a:xfrm>
+          <a:prstGeom prst="rect">
+            <a:avLst/>
+          </a:prstGeom>
+        </p:spPr>
+      </p:pic>
+    </p:spTree>
+    <p:extLst>
+      <p:ext uri="{BB962C8B-B14F-4D97-AF65-F5344CB8AC3E}">
+        <p14:creationId xmlns:p14="http://schemas.microsoft.com/office/powerpoint/2010/main" val="1175850028"/>
+      </p:ext>
+    </p:extLst>
+  </p:cSld>
+  <p:clrMapOvr>
+    <a:masterClrMapping/>
+  </p:clrMapOvr>
+</p:sld>
+</file>
+
+<file path=ppt/slides/slide5.xml><?xml version="1.0" encoding="utf-8"?>
+<p:sld xmlns:a="http://schemas.openxmlformats.org/drawingml/2006/main" xmlns:r="http://schemas.openxmlformats.org/officeDocument/2006/relationships" xmlns:p="http://schemas.openxmlformats.org/presentationml/2006/main">
+  <p:cSld>
+    <p:spTree>
+      <p:nvGrpSpPr>
+        <p:cNvPr id="1" name=""/>
+        <p:cNvGrpSpPr/>
+        <p:nvPr/>
+      </p:nvGrpSpPr>
+      <p:grpSpPr>
+        <a:xfrm>
+          <a:off x="0" y="0"/>
+          <a:ext cx="0" cy="0"/>
+          <a:chOff x="0" y="0"/>
+          <a:chExt cx="0" cy="0"/>
+        </a:xfrm>
+      </p:grpSpPr>
+      <p:sp>
+        <p:nvSpPr>
+          <p:cNvPr id="2" name="Rectangle : coins arrondis 1">
+            <a:extLst>
+              <a:ext uri="{FF2B5EF4-FFF2-40B4-BE49-F238E27FC236}">
+                <a16:creationId xmlns:a16="http://schemas.microsoft.com/office/drawing/2014/main" id="{88649944-08B6-41BC-BC88-7F5E3C287668}"/>
+              </a:ext>
+            </a:extLst>
+          </p:cNvPr>
+          <p:cNvSpPr/>
+          <p:nvPr/>
+        </p:nvSpPr>
+        <p:spPr>
+          <a:xfrm>
+            <a:off x="5398082" y="-151892"/>
+            <a:ext cx="2321169" cy="648000"/>
+          </a:xfrm>
+          <a:prstGeom prst="roundRect">
+            <a:avLst/>
+          </a:prstGeom>
+          <a:solidFill>
+            <a:schemeClr val="tx2"/>
+          </a:solidFill>
+          <a:ln>
+            <a:noFill/>
+          </a:ln>
+        </p:spPr>
+        <p:style>
+          <a:lnRef idx="2">
+            <a:schemeClr val="accent1">
+              <a:shade val="50000"/>
+            </a:schemeClr>
+          </a:lnRef>
+          <a:fillRef idx="1">
+            <a:schemeClr val="accent1"/>
+          </a:fillRef>
+          <a:effectRef idx="0">
+            <a:schemeClr val="accent1"/>
+          </a:effectRef>
+          <a:fontRef idx="minor">
+            <a:schemeClr val="lt1"/>
+          </a:fontRef>
+        </p:style>
+        <p:txBody>
+          <a:bodyPr rtlCol="0" anchor="ctr"/>
+          <a:lstStyle/>
+          <a:p>
+            <a:pPr algn="ctr"/>
+            <a:r>
+              <a:rPr lang="en-US" dirty="0">
+                <a:latin typeface="Gadugi" panose="020B0502040204020203" pitchFamily="34" charset="0"/>
+                <a:ea typeface="Gadugi" panose="020B0502040204020203" pitchFamily="34" charset="0"/>
+              </a:rPr>
+              <a:t>#4C5775</a:t>
+            </a:r>
+          </a:p>
+        </p:txBody>
+      </p:sp>
+      <p:sp>
+        <p:nvSpPr>
+          <p:cNvPr id="3" name="Rectangle : coins arrondis 2">
+            <a:extLst>
+              <a:ext uri="{FF2B5EF4-FFF2-40B4-BE49-F238E27FC236}">
+                <a16:creationId xmlns:a16="http://schemas.microsoft.com/office/drawing/2014/main" id="{DA236DC6-D840-4012-959E-11127C8BFA4F}"/>
+              </a:ext>
+            </a:extLst>
+          </p:cNvPr>
+          <p:cNvSpPr/>
+          <p:nvPr/>
+        </p:nvSpPr>
+        <p:spPr>
+          <a:xfrm>
+            <a:off x="5398080" y="4210438"/>
+            <a:ext cx="2321169" cy="648000"/>
+          </a:xfrm>
+          <a:prstGeom prst="roundRect">
+            <a:avLst/>
+          </a:prstGeom>
+          <a:solidFill>
+            <a:schemeClr val="accent3"/>
+          </a:solidFill>
+          <a:ln>
+            <a:noFill/>
+          </a:ln>
+        </p:spPr>
+        <p:style>
+          <a:lnRef idx="2">
+            <a:schemeClr val="accent1">
+              <a:shade val="50000"/>
+            </a:schemeClr>
+          </a:lnRef>
+          <a:fillRef idx="1">
+            <a:schemeClr val="accent1"/>
+          </a:fillRef>
+          <a:effectRef idx="0">
+            <a:schemeClr val="accent1"/>
+          </a:effectRef>
+          <a:fontRef idx="minor">
+            <a:schemeClr val="lt1"/>
+          </a:fontRef>
+        </p:style>
+        <p:txBody>
+          <a:bodyPr rtlCol="0" anchor="ctr"/>
+          <a:lstStyle/>
+          <a:p>
+            <a:pPr algn="ctr"/>
+            <a:r>
+              <a:rPr lang="en-US" dirty="0">
+                <a:latin typeface="Gadugi" panose="020B0502040204020203" pitchFamily="34" charset="0"/>
+                <a:ea typeface="Gadugi" panose="020B0502040204020203" pitchFamily="34" charset="0"/>
+              </a:rPr>
+              <a:t>#9B324B</a:t>
+            </a:r>
+          </a:p>
+        </p:txBody>
+      </p:sp>
+      <p:sp>
+        <p:nvSpPr>
+          <p:cNvPr id="4" name="Rectangle : coins arrondis 3">
+            <a:extLst>
+              <a:ext uri="{FF2B5EF4-FFF2-40B4-BE49-F238E27FC236}">
+                <a16:creationId xmlns:a16="http://schemas.microsoft.com/office/drawing/2014/main" id="{328AF0F6-E8E4-411E-8102-F74924117E36}"/>
+              </a:ext>
+            </a:extLst>
+          </p:cNvPr>
+          <p:cNvSpPr/>
+          <p:nvPr/>
+        </p:nvSpPr>
+        <p:spPr>
+          <a:xfrm>
+            <a:off x="8943922" y="2529947"/>
+            <a:ext cx="2321169" cy="648000"/>
+          </a:xfrm>
+          <a:prstGeom prst="roundRect">
+            <a:avLst/>
+          </a:prstGeom>
+          <a:solidFill>
+            <a:schemeClr val="accent4"/>
+          </a:solidFill>
+          <a:ln>
+            <a:noFill/>
+          </a:ln>
+        </p:spPr>
+        <p:style>
+          <a:lnRef idx="2">
+            <a:schemeClr val="accent1">
+              <a:shade val="50000"/>
+            </a:schemeClr>
+          </a:lnRef>
+          <a:fillRef idx="1">
+            <a:schemeClr val="accent1"/>
+          </a:fillRef>
+          <a:effectRef idx="0">
+            <a:schemeClr val="accent1"/>
+          </a:effectRef>
+          <a:fontRef idx="minor">
+            <a:schemeClr val="lt1"/>
+          </a:fontRef>
+        </p:style>
+        <p:txBody>
+          <a:bodyPr rtlCol="0" anchor="ctr"/>
+          <a:lstStyle/>
+          <a:p>
+            <a:pPr algn="ctr"/>
+            <a:r>
+              <a:rPr lang="en-US" dirty="0">
+                <a:solidFill>
+                  <a:schemeClr val="tx1"/>
+                </a:solidFill>
+                <a:latin typeface="Gadugi" panose="020B0502040204020203" pitchFamily="34" charset="0"/>
+                <a:ea typeface="Gadugi" panose="020B0502040204020203" pitchFamily="34" charset="0"/>
+              </a:rPr>
+              <a:t># F4E791</a:t>
+            </a:r>
+          </a:p>
+        </p:txBody>
+      </p:sp>
+      <p:sp>
+        <p:nvSpPr>
+          <p:cNvPr id="5" name="Rectangle : coins arrondis 4">
+            <a:extLst>
+              <a:ext uri="{FF2B5EF4-FFF2-40B4-BE49-F238E27FC236}">
+                <a16:creationId xmlns:a16="http://schemas.microsoft.com/office/drawing/2014/main" id="{F8024387-9D4F-4983-83C8-5CC1E30BE781}"/>
+              </a:ext>
+            </a:extLst>
+          </p:cNvPr>
+          <p:cNvSpPr/>
+          <p:nvPr/>
+        </p:nvSpPr>
+        <p:spPr>
+          <a:xfrm>
+            <a:off x="5398081" y="1881224"/>
+            <a:ext cx="2321169" cy="648000"/>
+          </a:xfrm>
+          <a:prstGeom prst="roundRect">
+            <a:avLst/>
+          </a:prstGeom>
+          <a:solidFill>
+            <a:schemeClr val="accent5"/>
+          </a:solidFill>
+          <a:ln>
+            <a:noFill/>
+          </a:ln>
+        </p:spPr>
+        <p:style>
+          <a:lnRef idx="2">
+            <a:schemeClr val="accent1">
+              <a:shade val="50000"/>
+            </a:schemeClr>
+          </a:lnRef>
+          <a:fillRef idx="1">
+            <a:schemeClr val="accent1"/>
+          </a:fillRef>
+          <a:effectRef idx="0">
+            <a:schemeClr val="accent1"/>
+          </a:effectRef>
+          <a:fontRef idx="minor">
+            <a:schemeClr val="lt1"/>
+          </a:fontRef>
+        </p:style>
+        <p:txBody>
+          <a:bodyPr rtlCol="0" anchor="ctr"/>
+          <a:lstStyle/>
+          <a:p>
+            <a:pPr algn="ctr"/>
+            <a:r>
+              <a:rPr lang="en-US" dirty="0">
+                <a:latin typeface="Gadugi" panose="020B0502040204020203" pitchFamily="34" charset="0"/>
+                <a:ea typeface="Gadugi" panose="020B0502040204020203" pitchFamily="34" charset="0"/>
+              </a:rPr>
+              <a:t>#A37C3D</a:t>
+            </a:r>
+          </a:p>
+        </p:txBody>
+      </p:sp>
+      <p:sp>
+        <p:nvSpPr>
+          <p:cNvPr id="6" name="Rectangle : coins arrondis 5">
+            <a:extLst>
+              <a:ext uri="{FF2B5EF4-FFF2-40B4-BE49-F238E27FC236}">
+                <a16:creationId xmlns:a16="http://schemas.microsoft.com/office/drawing/2014/main" id="{9A43CCBA-7E44-4D6C-8C73-3C4D3061A0ED}"/>
+              </a:ext>
+            </a:extLst>
+          </p:cNvPr>
+          <p:cNvSpPr/>
+          <p:nvPr/>
+        </p:nvSpPr>
+        <p:spPr>
+          <a:xfrm>
+            <a:off x="5398082" y="855233"/>
+            <a:ext cx="2321169" cy="648000"/>
+          </a:xfrm>
+          <a:prstGeom prst="roundRect">
+            <a:avLst/>
+          </a:prstGeom>
+          <a:solidFill>
+            <a:srgbClr val="6AAC91"/>
+          </a:solidFill>
+          <a:ln>
+            <a:noFill/>
+          </a:ln>
+        </p:spPr>
+        <p:style>
+          <a:lnRef idx="2">
+            <a:schemeClr val="accent1">
+              <a:shade val="50000"/>
+            </a:schemeClr>
+          </a:lnRef>
+          <a:fillRef idx="1">
+            <a:schemeClr val="accent1"/>
+          </a:fillRef>
+          <a:effectRef idx="0">
+            <a:schemeClr val="accent1"/>
+          </a:effectRef>
+          <a:fontRef idx="minor">
+            <a:schemeClr val="lt1"/>
+          </a:fontRef>
+        </p:style>
+        <p:txBody>
+          <a:bodyPr rtlCol="0" anchor="ctr"/>
+          <a:lstStyle/>
+          <a:p>
+            <a:pPr algn="ctr"/>
+            <a:r>
+              <a:rPr lang="en-US" dirty="0">
+                <a:latin typeface="Gadugi" panose="020B0502040204020203" pitchFamily="34" charset="0"/>
+                <a:ea typeface="Gadugi" panose="020B0502040204020203" pitchFamily="34" charset="0"/>
+              </a:rPr>
+              <a:t>#6AAC91</a:t>
+            </a:r>
+          </a:p>
+        </p:txBody>
+      </p:sp>
+      <p:sp>
+        <p:nvSpPr>
+          <p:cNvPr id="7" name="Rectangle : coins arrondis 6">
+            <a:extLst>
+              <a:ext uri="{FF2B5EF4-FFF2-40B4-BE49-F238E27FC236}">
+                <a16:creationId xmlns:a16="http://schemas.microsoft.com/office/drawing/2014/main" id="{2229E62A-BF4E-4324-BBBA-8182E437CE28}"/>
+              </a:ext>
+            </a:extLst>
+          </p:cNvPr>
+          <p:cNvSpPr/>
+          <p:nvPr/>
+        </p:nvSpPr>
+        <p:spPr>
+          <a:xfrm>
+            <a:off x="8771152" y="1355478"/>
+            <a:ext cx="2321169" cy="648000"/>
+          </a:xfrm>
+          <a:prstGeom prst="roundRect">
+            <a:avLst/>
+          </a:prstGeom>
+          <a:solidFill>
+            <a:schemeClr val="tx1"/>
+          </a:solidFill>
+          <a:ln>
+            <a:noFill/>
+          </a:ln>
+        </p:spPr>
+        <p:style>
+          <a:lnRef idx="2">
+            <a:schemeClr val="accent1">
+              <a:shade val="50000"/>
+            </a:schemeClr>
+          </a:lnRef>
+          <a:fillRef idx="1">
+            <a:schemeClr val="accent1"/>
+          </a:fillRef>
+          <a:effectRef idx="0">
+            <a:schemeClr val="accent1"/>
+          </a:effectRef>
+          <a:fontRef idx="minor">
+            <a:schemeClr val="lt1"/>
+          </a:fontRef>
+        </p:style>
+        <p:txBody>
+          <a:bodyPr rtlCol="0" anchor="ctr"/>
+          <a:lstStyle/>
+          <a:p>
+            <a:pPr algn="ctr"/>
+            <a:r>
+              <a:rPr lang="en-US" dirty="0">
+                <a:latin typeface="Gadugi" panose="020B0502040204020203" pitchFamily="34" charset="0"/>
+                <a:ea typeface="Gadugi" panose="020B0502040204020203" pitchFamily="34" charset="0"/>
+              </a:rPr>
+              <a:t>#19284F</a:t>
+            </a:r>
+          </a:p>
+        </p:txBody>
+      </p:sp>
+      <p:sp>
+        <p:nvSpPr>
+          <p:cNvPr id="8" name="ZoneTexte 7">
+            <a:extLst>
+              <a:ext uri="{FF2B5EF4-FFF2-40B4-BE49-F238E27FC236}">
+                <a16:creationId xmlns:a16="http://schemas.microsoft.com/office/drawing/2014/main" id="{CCFF5E72-D096-435C-9B6F-698706624F03}"/>
+              </a:ext>
+            </a:extLst>
+          </p:cNvPr>
+          <p:cNvSpPr txBox="1"/>
+          <p:nvPr/>
+        </p:nvSpPr>
+        <p:spPr>
+          <a:xfrm>
+            <a:off x="8771152" y="485901"/>
+            <a:ext cx="2209803" cy="369332"/>
+          </a:xfrm>
+          <a:prstGeom prst="rect">
+            <a:avLst/>
+          </a:prstGeom>
+          <a:noFill/>
+        </p:spPr>
+        <p:txBody>
+          <a:bodyPr wrap="square" rtlCol="0">
+            <a:spAutoFit/>
+          </a:bodyPr>
+          <a:lstStyle/>
+          <a:p>
+            <a:pPr algn="ctr"/>
+            <a:r>
+              <a:rPr lang="fr-FR" dirty="0"/>
+              <a:t>Jeu de couleurs SKS</a:t>
+            </a:r>
+            <a:endParaRPr lang="fr-FR" dirty="0">
+              <a:latin typeface="Stylus BT" panose="020E0402020206020304" pitchFamily="34" charset="0"/>
+            </a:endParaRPr>
+          </a:p>
+        </p:txBody>
+      </p:sp>
+      <p:sp>
+        <p:nvSpPr>
+          <p:cNvPr id="9" name="Rectangle : coins arrondis 8">
+            <a:extLst>
+              <a:ext uri="{FF2B5EF4-FFF2-40B4-BE49-F238E27FC236}">
+                <a16:creationId xmlns:a16="http://schemas.microsoft.com/office/drawing/2014/main" id="{DE08D2CC-7223-45DB-BF64-5DA6F283FD41}"/>
+              </a:ext>
+            </a:extLst>
+          </p:cNvPr>
+          <p:cNvSpPr/>
+          <p:nvPr/>
+        </p:nvSpPr>
+        <p:spPr>
+          <a:xfrm>
+            <a:off x="2522752" y="4210438"/>
+            <a:ext cx="2321169" cy="648000"/>
+          </a:xfrm>
+          <a:prstGeom prst="roundRect">
+            <a:avLst/>
+          </a:prstGeom>
+          <a:solidFill>
+            <a:schemeClr val="tx1"/>
+          </a:solidFill>
+          <a:ln>
+            <a:noFill/>
+          </a:ln>
+        </p:spPr>
+        <p:style>
+          <a:lnRef idx="2">
+            <a:schemeClr val="accent1">
+              <a:shade val="50000"/>
+            </a:schemeClr>
+          </a:lnRef>
+          <a:fillRef idx="1">
+            <a:schemeClr val="accent1"/>
+          </a:fillRef>
+          <a:effectRef idx="0">
+            <a:schemeClr val="accent1"/>
+          </a:effectRef>
+          <a:fontRef idx="minor">
+            <a:schemeClr val="lt1"/>
+          </a:fontRef>
+        </p:style>
+        <p:txBody>
+          <a:bodyPr rtlCol="0" anchor="ctr"/>
+          <a:lstStyle/>
+          <a:p>
+            <a:pPr algn="ctr"/>
+            <a:r>
+              <a:rPr lang="en-US" dirty="0">
+                <a:latin typeface="Gadugi" panose="020B0502040204020203" pitchFamily="34" charset="0"/>
+                <a:ea typeface="Gadugi" panose="020B0502040204020203" pitchFamily="34" charset="0"/>
+              </a:rPr>
+              <a:t>#19284F</a:t>
+            </a:r>
+          </a:p>
+        </p:txBody>
+      </p:sp>
+      <p:sp>
+        <p:nvSpPr>
+          <p:cNvPr id="10" name="Rectangle : coins arrondis 9">
+            <a:extLst>
+              <a:ext uri="{FF2B5EF4-FFF2-40B4-BE49-F238E27FC236}">
+                <a16:creationId xmlns:a16="http://schemas.microsoft.com/office/drawing/2014/main" id="{302867E3-E57C-4E5D-872B-C7AF1DE66330}"/>
+              </a:ext>
+            </a:extLst>
+          </p:cNvPr>
+          <p:cNvSpPr/>
+          <p:nvPr/>
+        </p:nvSpPr>
+        <p:spPr>
+          <a:xfrm>
+            <a:off x="9431602" y="3177947"/>
+            <a:ext cx="2321169" cy="648000"/>
+          </a:xfrm>
+          <a:prstGeom prst="roundRect">
+            <a:avLst/>
+          </a:prstGeom>
+          <a:solidFill>
+            <a:schemeClr val="accent4"/>
+          </a:solidFill>
+          <a:ln>
+            <a:noFill/>
+          </a:ln>
+        </p:spPr>
+        <p:style>
+          <a:lnRef idx="2">
+            <a:schemeClr val="accent1">
+              <a:shade val="50000"/>
+            </a:schemeClr>
+          </a:lnRef>
+          <a:fillRef idx="1">
+            <a:schemeClr val="accent1"/>
+          </a:fillRef>
+          <a:effectRef idx="0">
+            <a:schemeClr val="accent1"/>
+          </a:effectRef>
+          <a:fontRef idx="minor">
+            <a:schemeClr val="lt1"/>
+          </a:fontRef>
+        </p:style>
+        <p:txBody>
+          <a:bodyPr rtlCol="0" anchor="ctr"/>
+          <a:lstStyle/>
+          <a:p>
+            <a:pPr algn="ctr"/>
+            <a:r>
+              <a:rPr lang="en-US" dirty="0">
+                <a:solidFill>
+                  <a:schemeClr val="tx1"/>
+                </a:solidFill>
+                <a:latin typeface="Gadugi" panose="020B0502040204020203" pitchFamily="34" charset="0"/>
+                <a:ea typeface="Gadugi" panose="020B0502040204020203" pitchFamily="34" charset="0"/>
+              </a:rPr>
+              <a:t># F4E791</a:t>
+            </a:r>
+          </a:p>
+        </p:txBody>
+      </p:sp>
+      <p:sp>
+        <p:nvSpPr>
+          <p:cNvPr id="11" name="Rectangle : coins arrondis 10">
+            <a:extLst>
+              <a:ext uri="{FF2B5EF4-FFF2-40B4-BE49-F238E27FC236}">
+                <a16:creationId xmlns:a16="http://schemas.microsoft.com/office/drawing/2014/main" id="{DF144E0F-742D-4D86-9902-388CA694B714}"/>
+              </a:ext>
+            </a:extLst>
+          </p:cNvPr>
+          <p:cNvSpPr/>
+          <p:nvPr/>
+        </p:nvSpPr>
+        <p:spPr>
+          <a:xfrm>
+            <a:off x="8039682" y="4210438"/>
+            <a:ext cx="2321169" cy="648000"/>
+          </a:xfrm>
+          <a:prstGeom prst="roundRect">
+            <a:avLst/>
+          </a:prstGeom>
+          <a:solidFill>
+            <a:srgbClr val="6AAC91"/>
+          </a:solidFill>
+          <a:ln>
+            <a:noFill/>
+          </a:ln>
+        </p:spPr>
+        <p:style>
+          <a:lnRef idx="2">
+            <a:schemeClr val="accent1">
+              <a:shade val="50000"/>
+            </a:schemeClr>
+          </a:lnRef>
+          <a:fillRef idx="1">
+            <a:schemeClr val="accent1"/>
+          </a:fillRef>
+          <a:effectRef idx="0">
+            <a:schemeClr val="accent1"/>
+          </a:effectRef>
+          <a:fontRef idx="minor">
+            <a:schemeClr val="lt1"/>
+          </a:fontRef>
+        </p:style>
+        <p:txBody>
+          <a:bodyPr rtlCol="0" anchor="ctr"/>
+          <a:lstStyle/>
+          <a:p>
+            <a:pPr algn="ctr"/>
+            <a:r>
+              <a:rPr lang="en-US" dirty="0">
+                <a:latin typeface="Gadugi" panose="020B0502040204020203" pitchFamily="34" charset="0"/>
+                <a:ea typeface="Gadugi" panose="020B0502040204020203" pitchFamily="34" charset="0"/>
+              </a:rPr>
+              <a:t>#6AAC91</a:t>
+            </a:r>
+          </a:p>
+        </p:txBody>
+      </p:sp>
+      <p:sp>
+        <p:nvSpPr>
+          <p:cNvPr id="12" name="Rectangle : coins arrondis 11">
+            <a:extLst>
+              <a:ext uri="{FF2B5EF4-FFF2-40B4-BE49-F238E27FC236}">
+                <a16:creationId xmlns:a16="http://schemas.microsoft.com/office/drawing/2014/main" id="{59793F8B-09F3-4B7C-BB9B-8AD0F3FEB27D}"/>
+              </a:ext>
+            </a:extLst>
+          </p:cNvPr>
+          <p:cNvSpPr/>
+          <p:nvPr/>
+        </p:nvSpPr>
+        <p:spPr>
+          <a:xfrm>
+            <a:off x="1557602" y="1355478"/>
+            <a:ext cx="2321169" cy="648000"/>
+          </a:xfrm>
+          <a:prstGeom prst="roundRect">
+            <a:avLst/>
+          </a:prstGeom>
+          <a:solidFill>
+            <a:srgbClr val="FBF5D3"/>
+          </a:solidFill>
+          <a:ln>
+            <a:noFill/>
+          </a:ln>
+        </p:spPr>
+        <p:style>
+          <a:lnRef idx="2">
+            <a:schemeClr val="accent1">
+              <a:shade val="50000"/>
+            </a:schemeClr>
+          </a:lnRef>
+          <a:fillRef idx="1">
+            <a:schemeClr val="accent1"/>
+          </a:fillRef>
+          <a:effectRef idx="0">
+            <a:schemeClr val="accent1"/>
+          </a:effectRef>
+          <a:fontRef idx="minor">
+            <a:schemeClr val="lt1"/>
+          </a:fontRef>
+        </p:style>
+        <p:txBody>
+          <a:bodyPr rtlCol="0" anchor="ctr"/>
+          <a:lstStyle/>
+          <a:p>
+            <a:pPr algn="ctr"/>
+            <a:r>
+              <a:rPr lang="en-US" dirty="0">
+                <a:solidFill>
+                  <a:srgbClr val="475569"/>
+                </a:solidFill>
+                <a:latin typeface="Gadugi" panose="020B0502040204020203" pitchFamily="34" charset="0"/>
+                <a:ea typeface="Gadugi" panose="020B0502040204020203" pitchFamily="34" charset="0"/>
+              </a:rPr>
+              <a:t>#</a:t>
+            </a:r>
+            <a:r>
+              <a:rPr lang="fr-FR" dirty="0">
+                <a:solidFill>
+                  <a:srgbClr val="475569"/>
+                </a:solidFill>
+              </a:rPr>
+              <a:t> FBF5D3</a:t>
+            </a:r>
+            <a:endParaRPr lang="en-US" dirty="0">
+              <a:solidFill>
+                <a:srgbClr val="475569"/>
+              </a:solidFill>
+              <a:latin typeface="Gadugi" panose="020B0502040204020203" pitchFamily="34" charset="0"/>
+              <a:ea typeface="Gadugi" panose="020B0502040204020203" pitchFamily="34" charset="0"/>
+            </a:endParaRPr>
+          </a:p>
+        </p:txBody>
+      </p:sp>
+    </p:spTree>
+    <p:extLst>
+      <p:ext uri="{BB962C8B-B14F-4D97-AF65-F5344CB8AC3E}">
+        <p14:creationId xmlns:p14="http://schemas.microsoft.com/office/powerpoint/2010/main" val="2174595489"/>
       </p:ext>
     </p:extLst>
   </p:cSld>
